--- a/(8.14) .pptx
+++ b/(8.14) .pptx
@@ -5,10 +5,9 @@
     <p:sldMasterId id="2147483648" r:id="rId1"/>
   </p:sldMasterIdLst>
   <p:sldIdLst>
-    <p:sldId id="257" r:id="rId2"/>
-    <p:sldId id="258" r:id="rId3"/>
-    <p:sldId id="260" r:id="rId4"/>
-    <p:sldId id="259" r:id="rId5"/>
+    <p:sldId id="258" r:id="rId2"/>
+    <p:sldId id="260" r:id="rId3"/>
+    <p:sldId id="259" r:id="rId4"/>
   </p:sldIdLst>
   <p:sldSz cx="12192000" cy="6858000"/>
   <p:notesSz cx="6858000" cy="9144000"/>
@@ -126,6 +125,27 @@
 </p:presentation>
 </file>
 
+<file path=ppt/changesInfos/changesInfo1.xml><?xml version="1.0" encoding="utf-8"?>
+<pc:chgInfo xmlns:a="http://schemas.openxmlformats.org/drawingml/2006/main" xmlns:r="http://schemas.openxmlformats.org/officeDocument/2006/relationships" xmlns:ac="http://schemas.microsoft.com/office/drawing/2013/main/command" xmlns:pc="http://schemas.microsoft.com/office/powerpoint/2013/main/command">
+  <pc:docChgLst>
+    <pc:chgData name="musukie52@gmail.com" userId="017bd91f96aa8751" providerId="LiveId" clId="{5B2C3894-F97E-4CAB-8812-5BB4D83AAC6A}"/>
+    <pc:docChg chg="delSld">
+      <pc:chgData name="musukie52@gmail.com" userId="017bd91f96aa8751" providerId="LiveId" clId="{5B2C3894-F97E-4CAB-8812-5BB4D83AAC6A}" dt="2026-08-17T15:00:27.543" v="0" actId="2696"/>
+      <pc:docMkLst>
+        <pc:docMk/>
+      </pc:docMkLst>
+      <pc:sldChg chg="del">
+        <pc:chgData name="musukie52@gmail.com" userId="017bd91f96aa8751" providerId="LiveId" clId="{5B2C3894-F97E-4CAB-8812-5BB4D83AAC6A}" dt="2026-08-17T15:00:27.543" v="0" actId="2696"/>
+        <pc:sldMkLst>
+          <pc:docMk/>
+          <pc:sldMk cId="331190075" sldId="257"/>
+        </pc:sldMkLst>
+      </pc:sldChg>
+    </pc:docChg>
+  </pc:docChgLst>
+</pc:chgInfo>
+</file>
+
 <file path=ppt/slideLayouts/slideLayout1.xml><?xml version="1.0" encoding="utf-8"?>
 <p:sldLayout xmlns:a="http://schemas.openxmlformats.org/drawingml/2006/main" xmlns:r="http://schemas.openxmlformats.org/officeDocument/2006/relationships" xmlns:p="http://schemas.openxmlformats.org/presentationml/2006/main" type="title" preserve="1">
   <p:cSld name="제목 슬라이드">
@@ -168,10 +188,9 @@
           </a:lstStyle>
           <a:p>
             <a:r>
-              <a:rPr lang="ko-KR" altLang="en-US" smtClean="0"/>
+              <a:rPr lang="ko-KR" altLang="en-US"/>
               <a:t>마스터 제목 스타일 편집</a:t>
             </a:r>
-            <a:endParaRPr lang="ko-KR" altLang="en-US"/>
           </a:p>
         </p:txBody>
       </p:sp>
@@ -233,10 +252,9 @@
           </a:lstStyle>
           <a:p>
             <a:r>
-              <a:rPr lang="ko-KR" altLang="en-US" smtClean="0"/>
+              <a:rPr lang="ko-KR" altLang="en-US"/>
               <a:t>클릭하여 마스터 부제목 스타일 편집</a:t>
             </a:r>
-            <a:endParaRPr lang="ko-KR" altLang="en-US"/>
           </a:p>
         </p:txBody>
       </p:sp>
@@ -257,7 +275,7 @@
           <a:p>
             <a:fld id="{451D9184-6D94-492A-AD74-7E2F1866C490}" type="datetimeFigureOut">
               <a:rPr lang="ko-KR" altLang="en-US" smtClean="0"/>
-              <a:t>2026-08-14</a:t>
+              <a:t>2026-08-18</a:t>
             </a:fld>
             <a:endParaRPr lang="ko-KR" altLang="en-US"/>
           </a:p>
@@ -351,10 +369,9 @@
           <a:lstStyle/>
           <a:p>
             <a:r>
-              <a:rPr lang="ko-KR" altLang="en-US" smtClean="0"/>
+              <a:rPr lang="ko-KR" altLang="en-US"/>
               <a:t>마스터 제목 스타일 편집</a:t>
             </a:r>
-            <a:endParaRPr lang="ko-KR" altLang="en-US"/>
           </a:p>
         </p:txBody>
       </p:sp>
@@ -375,38 +392,37 @@
           <a:p>
             <a:pPr lvl="0"/>
             <a:r>
-              <a:rPr lang="ko-KR" altLang="en-US" smtClean="0"/>
+              <a:rPr lang="ko-KR" altLang="en-US"/>
               <a:t>마스터 텍스트 스타일 편집</a:t>
             </a:r>
           </a:p>
           <a:p>
             <a:pPr lvl="1"/>
             <a:r>
-              <a:rPr lang="ko-KR" altLang="en-US" smtClean="0"/>
+              <a:rPr lang="ko-KR" altLang="en-US"/>
               <a:t>둘째 수준</a:t>
             </a:r>
           </a:p>
           <a:p>
             <a:pPr lvl="2"/>
             <a:r>
-              <a:rPr lang="ko-KR" altLang="en-US" smtClean="0"/>
+              <a:rPr lang="ko-KR" altLang="en-US"/>
               <a:t>셋째 수준</a:t>
             </a:r>
           </a:p>
           <a:p>
             <a:pPr lvl="3"/>
             <a:r>
-              <a:rPr lang="ko-KR" altLang="en-US" smtClean="0"/>
+              <a:rPr lang="ko-KR" altLang="en-US"/>
               <a:t>넷째 수준</a:t>
             </a:r>
           </a:p>
           <a:p>
             <a:pPr lvl="4"/>
             <a:r>
-              <a:rPr lang="ko-KR" altLang="en-US" smtClean="0"/>
+              <a:rPr lang="ko-KR" altLang="en-US"/>
               <a:t>다섯째 수준</a:t>
             </a:r>
-            <a:endParaRPr lang="ko-KR" altLang="en-US"/>
           </a:p>
         </p:txBody>
       </p:sp>
@@ -427,7 +443,7 @@
           <a:p>
             <a:fld id="{451D9184-6D94-492A-AD74-7E2F1866C490}" type="datetimeFigureOut">
               <a:rPr lang="ko-KR" altLang="en-US" smtClean="0"/>
-              <a:t>2026-08-14</a:t>
+              <a:t>2026-08-18</a:t>
             </a:fld>
             <a:endParaRPr lang="ko-KR" altLang="en-US"/>
           </a:p>
@@ -526,10 +542,9 @@
           <a:lstStyle/>
           <a:p>
             <a:r>
-              <a:rPr lang="ko-KR" altLang="en-US" smtClean="0"/>
+              <a:rPr lang="ko-KR" altLang="en-US"/>
               <a:t>마스터 제목 스타일 편집</a:t>
             </a:r>
-            <a:endParaRPr lang="ko-KR" altLang="en-US"/>
           </a:p>
         </p:txBody>
       </p:sp>
@@ -555,38 +570,37 @@
           <a:p>
             <a:pPr lvl="0"/>
             <a:r>
-              <a:rPr lang="ko-KR" altLang="en-US" smtClean="0"/>
+              <a:rPr lang="ko-KR" altLang="en-US"/>
               <a:t>마스터 텍스트 스타일 편집</a:t>
             </a:r>
           </a:p>
           <a:p>
             <a:pPr lvl="1"/>
             <a:r>
-              <a:rPr lang="ko-KR" altLang="en-US" smtClean="0"/>
+              <a:rPr lang="ko-KR" altLang="en-US"/>
               <a:t>둘째 수준</a:t>
             </a:r>
           </a:p>
           <a:p>
             <a:pPr lvl="2"/>
             <a:r>
-              <a:rPr lang="ko-KR" altLang="en-US" smtClean="0"/>
+              <a:rPr lang="ko-KR" altLang="en-US"/>
               <a:t>셋째 수준</a:t>
             </a:r>
           </a:p>
           <a:p>
             <a:pPr lvl="3"/>
             <a:r>
-              <a:rPr lang="ko-KR" altLang="en-US" smtClean="0"/>
+              <a:rPr lang="ko-KR" altLang="en-US"/>
               <a:t>넷째 수준</a:t>
             </a:r>
           </a:p>
           <a:p>
             <a:pPr lvl="4"/>
             <a:r>
-              <a:rPr lang="ko-KR" altLang="en-US" smtClean="0"/>
+              <a:rPr lang="ko-KR" altLang="en-US"/>
               <a:t>다섯째 수준</a:t>
             </a:r>
-            <a:endParaRPr lang="ko-KR" altLang="en-US"/>
           </a:p>
         </p:txBody>
       </p:sp>
@@ -607,7 +621,7 @@
           <a:p>
             <a:fld id="{451D9184-6D94-492A-AD74-7E2F1866C490}" type="datetimeFigureOut">
               <a:rPr lang="ko-KR" altLang="en-US" smtClean="0"/>
-              <a:t>2026-08-14</a:t>
+              <a:t>2026-08-18</a:t>
             </a:fld>
             <a:endParaRPr lang="ko-KR" altLang="en-US"/>
           </a:p>
@@ -701,10 +715,9 @@
           <a:lstStyle/>
           <a:p>
             <a:r>
-              <a:rPr lang="ko-KR" altLang="en-US" smtClean="0"/>
+              <a:rPr lang="ko-KR" altLang="en-US"/>
               <a:t>마스터 제목 스타일 편집</a:t>
             </a:r>
-            <a:endParaRPr lang="ko-KR" altLang="en-US"/>
           </a:p>
         </p:txBody>
       </p:sp>
@@ -725,38 +738,37 @@
           <a:p>
             <a:pPr lvl="0"/>
             <a:r>
-              <a:rPr lang="ko-KR" altLang="en-US" smtClean="0"/>
+              <a:rPr lang="ko-KR" altLang="en-US"/>
               <a:t>마스터 텍스트 스타일 편집</a:t>
             </a:r>
           </a:p>
           <a:p>
             <a:pPr lvl="1"/>
             <a:r>
-              <a:rPr lang="ko-KR" altLang="en-US" smtClean="0"/>
+              <a:rPr lang="ko-KR" altLang="en-US"/>
               <a:t>둘째 수준</a:t>
             </a:r>
           </a:p>
           <a:p>
             <a:pPr lvl="2"/>
             <a:r>
-              <a:rPr lang="ko-KR" altLang="en-US" smtClean="0"/>
+              <a:rPr lang="ko-KR" altLang="en-US"/>
               <a:t>셋째 수준</a:t>
             </a:r>
           </a:p>
           <a:p>
             <a:pPr lvl="3"/>
             <a:r>
-              <a:rPr lang="ko-KR" altLang="en-US" smtClean="0"/>
+              <a:rPr lang="ko-KR" altLang="en-US"/>
               <a:t>넷째 수준</a:t>
             </a:r>
           </a:p>
           <a:p>
             <a:pPr lvl="4"/>
             <a:r>
-              <a:rPr lang="ko-KR" altLang="en-US" smtClean="0"/>
+              <a:rPr lang="ko-KR" altLang="en-US"/>
               <a:t>다섯째 수준</a:t>
             </a:r>
-            <a:endParaRPr lang="ko-KR" altLang="en-US"/>
           </a:p>
         </p:txBody>
       </p:sp>
@@ -777,7 +789,7 @@
           <a:p>
             <a:fld id="{451D9184-6D94-492A-AD74-7E2F1866C490}" type="datetimeFigureOut">
               <a:rPr lang="ko-KR" altLang="en-US" smtClean="0"/>
-              <a:t>2026-08-14</a:t>
+              <a:t>2026-08-18</a:t>
             </a:fld>
             <a:endParaRPr lang="ko-KR" altLang="en-US"/>
           </a:p>
@@ -880,10 +892,9 @@
           </a:lstStyle>
           <a:p>
             <a:r>
-              <a:rPr lang="ko-KR" altLang="en-US" smtClean="0"/>
+              <a:rPr lang="ko-KR" altLang="en-US"/>
               <a:t>마스터 제목 스타일 편집</a:t>
             </a:r>
-            <a:endParaRPr lang="ko-KR" altLang="en-US"/>
           </a:p>
         </p:txBody>
       </p:sp>
@@ -1000,7 +1011,7 @@
           <a:p>
             <a:pPr lvl="0"/>
             <a:r>
-              <a:rPr lang="ko-KR" altLang="en-US" smtClean="0"/>
+              <a:rPr lang="ko-KR" altLang="en-US"/>
               <a:t>마스터 텍스트 스타일 편집</a:t>
             </a:r>
           </a:p>
@@ -1023,7 +1034,7 @@
           <a:p>
             <a:fld id="{451D9184-6D94-492A-AD74-7E2F1866C490}" type="datetimeFigureOut">
               <a:rPr lang="ko-KR" altLang="en-US" smtClean="0"/>
-              <a:t>2026-08-14</a:t>
+              <a:t>2026-08-18</a:t>
             </a:fld>
             <a:endParaRPr lang="ko-KR" altLang="en-US"/>
           </a:p>
@@ -1117,10 +1128,9 @@
           <a:lstStyle/>
           <a:p>
             <a:r>
-              <a:rPr lang="ko-KR" altLang="en-US" smtClean="0"/>
+              <a:rPr lang="ko-KR" altLang="en-US"/>
               <a:t>마스터 제목 스타일 편집</a:t>
             </a:r>
-            <a:endParaRPr lang="ko-KR" altLang="en-US"/>
           </a:p>
         </p:txBody>
       </p:sp>
@@ -1146,38 +1156,37 @@
           <a:p>
             <a:pPr lvl="0"/>
             <a:r>
-              <a:rPr lang="ko-KR" altLang="en-US" smtClean="0"/>
+              <a:rPr lang="ko-KR" altLang="en-US"/>
               <a:t>마스터 텍스트 스타일 편집</a:t>
             </a:r>
           </a:p>
           <a:p>
             <a:pPr lvl="1"/>
             <a:r>
-              <a:rPr lang="ko-KR" altLang="en-US" smtClean="0"/>
+              <a:rPr lang="ko-KR" altLang="en-US"/>
               <a:t>둘째 수준</a:t>
             </a:r>
           </a:p>
           <a:p>
             <a:pPr lvl="2"/>
             <a:r>
-              <a:rPr lang="ko-KR" altLang="en-US" smtClean="0"/>
+              <a:rPr lang="ko-KR" altLang="en-US"/>
               <a:t>셋째 수준</a:t>
             </a:r>
           </a:p>
           <a:p>
             <a:pPr lvl="3"/>
             <a:r>
-              <a:rPr lang="ko-KR" altLang="en-US" smtClean="0"/>
+              <a:rPr lang="ko-KR" altLang="en-US"/>
               <a:t>넷째 수준</a:t>
             </a:r>
           </a:p>
           <a:p>
             <a:pPr lvl="4"/>
             <a:r>
-              <a:rPr lang="ko-KR" altLang="en-US" smtClean="0"/>
+              <a:rPr lang="ko-KR" altLang="en-US"/>
               <a:t>다섯째 수준</a:t>
             </a:r>
-            <a:endParaRPr lang="ko-KR" altLang="en-US"/>
           </a:p>
         </p:txBody>
       </p:sp>
@@ -1203,38 +1212,37 @@
           <a:p>
             <a:pPr lvl="0"/>
             <a:r>
-              <a:rPr lang="ko-KR" altLang="en-US" smtClean="0"/>
+              <a:rPr lang="ko-KR" altLang="en-US"/>
               <a:t>마스터 텍스트 스타일 편집</a:t>
             </a:r>
           </a:p>
           <a:p>
             <a:pPr lvl="1"/>
             <a:r>
-              <a:rPr lang="ko-KR" altLang="en-US" smtClean="0"/>
+              <a:rPr lang="ko-KR" altLang="en-US"/>
               <a:t>둘째 수준</a:t>
             </a:r>
           </a:p>
           <a:p>
             <a:pPr lvl="2"/>
             <a:r>
-              <a:rPr lang="ko-KR" altLang="en-US" smtClean="0"/>
+              <a:rPr lang="ko-KR" altLang="en-US"/>
               <a:t>셋째 수준</a:t>
             </a:r>
           </a:p>
           <a:p>
             <a:pPr lvl="3"/>
             <a:r>
-              <a:rPr lang="ko-KR" altLang="en-US" smtClean="0"/>
+              <a:rPr lang="ko-KR" altLang="en-US"/>
               <a:t>넷째 수준</a:t>
             </a:r>
           </a:p>
           <a:p>
             <a:pPr lvl="4"/>
             <a:r>
-              <a:rPr lang="ko-KR" altLang="en-US" smtClean="0"/>
+              <a:rPr lang="ko-KR" altLang="en-US"/>
               <a:t>다섯째 수준</a:t>
             </a:r>
-            <a:endParaRPr lang="ko-KR" altLang="en-US"/>
           </a:p>
         </p:txBody>
       </p:sp>
@@ -1255,7 +1263,7 @@
           <a:p>
             <a:fld id="{451D9184-6D94-492A-AD74-7E2F1866C490}" type="datetimeFigureOut">
               <a:rPr lang="ko-KR" altLang="en-US" smtClean="0"/>
-              <a:t>2026-08-14</a:t>
+              <a:t>2026-08-18</a:t>
             </a:fld>
             <a:endParaRPr lang="ko-KR" altLang="en-US"/>
           </a:p>
@@ -1354,10 +1362,9 @@
           <a:lstStyle/>
           <a:p>
             <a:r>
-              <a:rPr lang="ko-KR" altLang="en-US" smtClean="0"/>
+              <a:rPr lang="ko-KR" altLang="en-US"/>
               <a:t>마스터 제목 스타일 편집</a:t>
             </a:r>
-            <a:endParaRPr lang="ko-KR" altLang="en-US"/>
           </a:p>
         </p:txBody>
       </p:sp>
@@ -1420,7 +1427,7 @@
           <a:p>
             <a:pPr lvl="0"/>
             <a:r>
-              <a:rPr lang="ko-KR" altLang="en-US" smtClean="0"/>
+              <a:rPr lang="ko-KR" altLang="en-US"/>
               <a:t>마스터 텍스트 스타일 편집</a:t>
             </a:r>
           </a:p>
@@ -1448,38 +1455,37 @@
           <a:p>
             <a:pPr lvl="0"/>
             <a:r>
-              <a:rPr lang="ko-KR" altLang="en-US" smtClean="0"/>
+              <a:rPr lang="ko-KR" altLang="en-US"/>
               <a:t>마스터 텍스트 스타일 편집</a:t>
             </a:r>
           </a:p>
           <a:p>
             <a:pPr lvl="1"/>
             <a:r>
-              <a:rPr lang="ko-KR" altLang="en-US" smtClean="0"/>
+              <a:rPr lang="ko-KR" altLang="en-US"/>
               <a:t>둘째 수준</a:t>
             </a:r>
           </a:p>
           <a:p>
             <a:pPr lvl="2"/>
             <a:r>
-              <a:rPr lang="ko-KR" altLang="en-US" smtClean="0"/>
+              <a:rPr lang="ko-KR" altLang="en-US"/>
               <a:t>셋째 수준</a:t>
             </a:r>
           </a:p>
           <a:p>
             <a:pPr lvl="3"/>
             <a:r>
-              <a:rPr lang="ko-KR" altLang="en-US" smtClean="0"/>
+              <a:rPr lang="ko-KR" altLang="en-US"/>
               <a:t>넷째 수준</a:t>
             </a:r>
           </a:p>
           <a:p>
             <a:pPr lvl="4"/>
             <a:r>
-              <a:rPr lang="ko-KR" altLang="en-US" smtClean="0"/>
+              <a:rPr lang="ko-KR" altLang="en-US"/>
               <a:t>다섯째 수준</a:t>
             </a:r>
-            <a:endParaRPr lang="ko-KR" altLang="en-US"/>
           </a:p>
         </p:txBody>
       </p:sp>
@@ -1542,7 +1548,7 @@
           <a:p>
             <a:pPr lvl="0"/>
             <a:r>
-              <a:rPr lang="ko-KR" altLang="en-US" smtClean="0"/>
+              <a:rPr lang="ko-KR" altLang="en-US"/>
               <a:t>마스터 텍스트 스타일 편집</a:t>
             </a:r>
           </a:p>
@@ -1570,38 +1576,37 @@
           <a:p>
             <a:pPr lvl="0"/>
             <a:r>
-              <a:rPr lang="ko-KR" altLang="en-US" smtClean="0"/>
+              <a:rPr lang="ko-KR" altLang="en-US"/>
               <a:t>마스터 텍스트 스타일 편집</a:t>
             </a:r>
           </a:p>
           <a:p>
             <a:pPr lvl="1"/>
             <a:r>
-              <a:rPr lang="ko-KR" altLang="en-US" smtClean="0"/>
+              <a:rPr lang="ko-KR" altLang="en-US"/>
               <a:t>둘째 수준</a:t>
             </a:r>
           </a:p>
           <a:p>
             <a:pPr lvl="2"/>
             <a:r>
-              <a:rPr lang="ko-KR" altLang="en-US" smtClean="0"/>
+              <a:rPr lang="ko-KR" altLang="en-US"/>
               <a:t>셋째 수준</a:t>
             </a:r>
           </a:p>
           <a:p>
             <a:pPr lvl="3"/>
             <a:r>
-              <a:rPr lang="ko-KR" altLang="en-US" smtClean="0"/>
+              <a:rPr lang="ko-KR" altLang="en-US"/>
               <a:t>넷째 수준</a:t>
             </a:r>
           </a:p>
           <a:p>
             <a:pPr lvl="4"/>
             <a:r>
-              <a:rPr lang="ko-KR" altLang="en-US" smtClean="0"/>
+              <a:rPr lang="ko-KR" altLang="en-US"/>
               <a:t>다섯째 수준</a:t>
             </a:r>
-            <a:endParaRPr lang="ko-KR" altLang="en-US"/>
           </a:p>
         </p:txBody>
       </p:sp>
@@ -1622,7 +1627,7 @@
           <a:p>
             <a:fld id="{451D9184-6D94-492A-AD74-7E2F1866C490}" type="datetimeFigureOut">
               <a:rPr lang="ko-KR" altLang="en-US" smtClean="0"/>
-              <a:t>2026-08-14</a:t>
+              <a:t>2026-08-18</a:t>
             </a:fld>
             <a:endParaRPr lang="ko-KR" altLang="en-US"/>
           </a:p>
@@ -1716,10 +1721,9 @@
           <a:lstStyle/>
           <a:p>
             <a:r>
-              <a:rPr lang="ko-KR" altLang="en-US" smtClean="0"/>
+              <a:rPr lang="ko-KR" altLang="en-US"/>
               <a:t>마스터 제목 스타일 편집</a:t>
             </a:r>
-            <a:endParaRPr lang="ko-KR" altLang="en-US"/>
           </a:p>
         </p:txBody>
       </p:sp>
@@ -1740,7 +1744,7 @@
           <a:p>
             <a:fld id="{451D9184-6D94-492A-AD74-7E2F1866C490}" type="datetimeFigureOut">
               <a:rPr lang="ko-KR" altLang="en-US" smtClean="0"/>
-              <a:t>2026-08-14</a:t>
+              <a:t>2026-08-18</a:t>
             </a:fld>
             <a:endParaRPr lang="ko-KR" altLang="en-US"/>
           </a:p>
@@ -1835,7 +1839,7 @@
           <a:p>
             <a:fld id="{451D9184-6D94-492A-AD74-7E2F1866C490}" type="datetimeFigureOut">
               <a:rPr lang="ko-KR" altLang="en-US" smtClean="0"/>
-              <a:t>2026-08-14</a:t>
+              <a:t>2026-08-18</a:t>
             </a:fld>
             <a:endParaRPr lang="ko-KR" altLang="en-US"/>
           </a:p>
@@ -1938,10 +1942,9 @@
           </a:lstStyle>
           <a:p>
             <a:r>
-              <a:rPr lang="ko-KR" altLang="en-US" smtClean="0"/>
+              <a:rPr lang="ko-KR" altLang="en-US"/>
               <a:t>마스터 제목 스타일 편집</a:t>
             </a:r>
-            <a:endParaRPr lang="ko-KR" altLang="en-US"/>
           </a:p>
         </p:txBody>
       </p:sp>
@@ -1995,38 +1998,37 @@
           <a:p>
             <a:pPr lvl="0"/>
             <a:r>
-              <a:rPr lang="ko-KR" altLang="en-US" smtClean="0"/>
+              <a:rPr lang="ko-KR" altLang="en-US"/>
               <a:t>마스터 텍스트 스타일 편집</a:t>
             </a:r>
           </a:p>
           <a:p>
             <a:pPr lvl="1"/>
             <a:r>
-              <a:rPr lang="ko-KR" altLang="en-US" smtClean="0"/>
+              <a:rPr lang="ko-KR" altLang="en-US"/>
               <a:t>둘째 수준</a:t>
             </a:r>
           </a:p>
           <a:p>
             <a:pPr lvl="2"/>
             <a:r>
-              <a:rPr lang="ko-KR" altLang="en-US" smtClean="0"/>
+              <a:rPr lang="ko-KR" altLang="en-US"/>
               <a:t>셋째 수준</a:t>
             </a:r>
           </a:p>
           <a:p>
             <a:pPr lvl="3"/>
             <a:r>
-              <a:rPr lang="ko-KR" altLang="en-US" smtClean="0"/>
+              <a:rPr lang="ko-KR" altLang="en-US"/>
               <a:t>넷째 수준</a:t>
             </a:r>
           </a:p>
           <a:p>
             <a:pPr lvl="4"/>
             <a:r>
-              <a:rPr lang="ko-KR" altLang="en-US" smtClean="0"/>
+              <a:rPr lang="ko-KR" altLang="en-US"/>
               <a:t>다섯째 수준</a:t>
             </a:r>
-            <a:endParaRPr lang="ko-KR" altLang="en-US"/>
           </a:p>
         </p:txBody>
       </p:sp>
@@ -2089,7 +2091,7 @@
           <a:p>
             <a:pPr lvl="0"/>
             <a:r>
-              <a:rPr lang="ko-KR" altLang="en-US" smtClean="0"/>
+              <a:rPr lang="ko-KR" altLang="en-US"/>
               <a:t>마스터 텍스트 스타일 편집</a:t>
             </a:r>
           </a:p>
@@ -2112,7 +2114,7 @@
           <a:p>
             <a:fld id="{451D9184-6D94-492A-AD74-7E2F1866C490}" type="datetimeFigureOut">
               <a:rPr lang="ko-KR" altLang="en-US" smtClean="0"/>
-              <a:t>2026-08-14</a:t>
+              <a:t>2026-08-18</a:t>
             </a:fld>
             <a:endParaRPr lang="ko-KR" altLang="en-US"/>
           </a:p>
@@ -2215,10 +2217,9 @@
           </a:lstStyle>
           <a:p>
             <a:r>
-              <a:rPr lang="ko-KR" altLang="en-US" smtClean="0"/>
+              <a:rPr lang="ko-KR" altLang="en-US"/>
               <a:t>마스터 제목 스타일 편집</a:t>
             </a:r>
-            <a:endParaRPr lang="ko-KR" altLang="en-US"/>
           </a:p>
         </p:txBody>
       </p:sp>
@@ -2342,7 +2343,7 @@
           <a:p>
             <a:pPr lvl="0"/>
             <a:r>
-              <a:rPr lang="ko-KR" altLang="en-US" smtClean="0"/>
+              <a:rPr lang="ko-KR" altLang="en-US"/>
               <a:t>마스터 텍스트 스타일 편집</a:t>
             </a:r>
           </a:p>
@@ -2365,7 +2366,7 @@
           <a:p>
             <a:fld id="{451D9184-6D94-492A-AD74-7E2F1866C490}" type="datetimeFigureOut">
               <a:rPr lang="ko-KR" altLang="en-US" smtClean="0"/>
-              <a:t>2026-08-14</a:t>
+              <a:t>2026-08-18</a:t>
             </a:fld>
             <a:endParaRPr lang="ko-KR" altLang="en-US"/>
           </a:p>
@@ -2474,10 +2475,9 @@
           <a:lstStyle/>
           <a:p>
             <a:r>
-              <a:rPr lang="ko-KR" altLang="en-US" smtClean="0"/>
+              <a:rPr lang="ko-KR" altLang="en-US"/>
               <a:t>마스터 제목 스타일 편집</a:t>
             </a:r>
-            <a:endParaRPr lang="ko-KR" altLang="en-US"/>
           </a:p>
         </p:txBody>
       </p:sp>
@@ -2508,38 +2508,37 @@
           <a:p>
             <a:pPr lvl="0"/>
             <a:r>
-              <a:rPr lang="ko-KR" altLang="en-US" smtClean="0"/>
+              <a:rPr lang="ko-KR" altLang="en-US"/>
               <a:t>마스터 텍스트 스타일 편집</a:t>
             </a:r>
           </a:p>
           <a:p>
             <a:pPr lvl="1"/>
             <a:r>
-              <a:rPr lang="ko-KR" altLang="en-US" smtClean="0"/>
+              <a:rPr lang="ko-KR" altLang="en-US"/>
               <a:t>둘째 수준</a:t>
             </a:r>
           </a:p>
           <a:p>
             <a:pPr lvl="2"/>
             <a:r>
-              <a:rPr lang="ko-KR" altLang="en-US" smtClean="0"/>
+              <a:rPr lang="ko-KR" altLang="en-US"/>
               <a:t>셋째 수준</a:t>
             </a:r>
           </a:p>
           <a:p>
             <a:pPr lvl="3"/>
             <a:r>
-              <a:rPr lang="ko-KR" altLang="en-US" smtClean="0"/>
+              <a:rPr lang="ko-KR" altLang="en-US"/>
               <a:t>넷째 수준</a:t>
             </a:r>
           </a:p>
           <a:p>
             <a:pPr lvl="4"/>
             <a:r>
-              <a:rPr lang="ko-KR" altLang="en-US" smtClean="0"/>
+              <a:rPr lang="ko-KR" altLang="en-US"/>
               <a:t>다섯째 수준</a:t>
             </a:r>
-            <a:endParaRPr lang="ko-KR" altLang="en-US"/>
           </a:p>
         </p:txBody>
       </p:sp>
@@ -2578,7 +2577,7 @@
           <a:p>
             <a:fld id="{451D9184-6D94-492A-AD74-7E2F1866C490}" type="datetimeFigureOut">
               <a:rPr lang="ko-KR" altLang="en-US" smtClean="0"/>
-              <a:t>2026-08-14</a:t>
+              <a:t>2026-08-18</a:t>
             </a:fld>
             <a:endParaRPr lang="ko-KR" altLang="en-US"/>
           </a:p>
@@ -2983,86 +2982,6 @@
           <a:chExt cx="0" cy="0"/>
         </a:xfrm>
       </p:grpSpPr>
-      <p:sp>
-        <p:nvSpPr>
-          <p:cNvPr id="2" name="제목 1"/>
-          <p:cNvSpPr>
-            <a:spLocks noGrp="1"/>
-          </p:cNvSpPr>
-          <p:nvPr>
-            <p:ph type="title"/>
-          </p:nvPr>
-        </p:nvSpPr>
-        <p:spPr/>
-        <p:txBody>
-          <a:bodyPr/>
-          <a:lstStyle/>
-          <a:p>
-            <a:r>
-              <a:rPr lang="ko-KR" altLang="en-US" smtClean="0"/>
-              <a:t>시스템</a:t>
-            </a:r>
-            <a:endParaRPr lang="ko-KR" altLang="en-US"/>
-          </a:p>
-        </p:txBody>
-      </p:sp>
-      <p:sp>
-        <p:nvSpPr>
-          <p:cNvPr id="3" name="내용 개체 틀 2"/>
-          <p:cNvSpPr>
-            <a:spLocks noGrp="1"/>
-          </p:cNvSpPr>
-          <p:nvPr>
-            <p:ph idx="1"/>
-          </p:nvPr>
-        </p:nvSpPr>
-        <p:spPr/>
-        <p:txBody>
-          <a:bodyPr/>
-          <a:lstStyle/>
-          <a:p>
-            <a:r>
-              <a:rPr lang="ko-KR" altLang="en-US" smtClean="0"/>
-              <a:t>역기획서보다는 우리가 직접 만드는 게 좋다</a:t>
-            </a:r>
-            <a:r>
-              <a:rPr lang="en-US" altLang="ko-KR" smtClean="0"/>
-              <a:t>.</a:t>
-            </a:r>
-            <a:endParaRPr lang="ko-KR" altLang="en-US"/>
-          </a:p>
-        </p:txBody>
-      </p:sp>
-    </p:spTree>
-    <p:extLst>
-      <p:ext uri="{BB962C8B-B14F-4D97-AF65-F5344CB8AC3E}">
-        <p14:creationId xmlns:p14="http://schemas.microsoft.com/office/powerpoint/2010/main" val="331190075"/>
-      </p:ext>
-    </p:extLst>
-  </p:cSld>
-  <p:clrMapOvr>
-    <a:masterClrMapping/>
-  </p:clrMapOvr>
-</p:sld>
-</file>
-
-<file path=ppt/slides/slide2.xml><?xml version="1.0" encoding="utf-8"?>
-<p:sld xmlns:a="http://schemas.openxmlformats.org/drawingml/2006/main" xmlns:r="http://schemas.openxmlformats.org/officeDocument/2006/relationships" xmlns:p="http://schemas.openxmlformats.org/presentationml/2006/main">
-  <p:cSld>
-    <p:spTree>
-      <p:nvGrpSpPr>
-        <p:cNvPr id="1" name=""/>
-        <p:cNvGrpSpPr/>
-        <p:nvPr/>
-      </p:nvGrpSpPr>
-      <p:grpSpPr>
-        <a:xfrm>
-          <a:off x="0" y="0"/>
-          <a:ext cx="0" cy="0"/>
-          <a:chOff x="0" y="0"/>
-          <a:chExt cx="0" cy="0"/>
-        </a:xfrm>
-      </p:grpSpPr>
       <p:pic>
         <p:nvPicPr>
           <p:cNvPr id="4" name="그림 3"/>
@@ -3100,7 +3019,7 @@
 </p:sld>
 </file>
 
-<file path=ppt/slides/slide3.xml><?xml version="1.0" encoding="utf-8"?>
+<file path=ppt/slides/slide2.xml><?xml version="1.0" encoding="utf-8"?>
 <p:sld xmlns:a="http://schemas.openxmlformats.org/drawingml/2006/main" xmlns:r="http://schemas.openxmlformats.org/officeDocument/2006/relationships" xmlns:p="http://schemas.openxmlformats.org/presentationml/2006/main">
   <p:cSld>
     <p:spTree>
@@ -3154,7 +3073,7 @@
 </p:sld>
 </file>
 
-<file path=ppt/slides/slide4.xml><?xml version="1.0" encoding="utf-8"?>
+<file path=ppt/slides/slide3.xml><?xml version="1.0" encoding="utf-8"?>
 <p:sld xmlns:a="http://schemas.openxmlformats.org/drawingml/2006/main" xmlns:r="http://schemas.openxmlformats.org/officeDocument/2006/relationships" xmlns:p="http://schemas.openxmlformats.org/presentationml/2006/main">
   <p:cSld>
     <p:spTree>
@@ -3187,10 +3106,9 @@
           <a:lstStyle/>
           <a:p>
             <a:r>
-              <a:rPr lang="ko-KR" altLang="en-US" smtClean="0"/>
+              <a:rPr lang="ko-KR" altLang="en-US"/>
               <a:t>슬로건</a:t>
             </a:r>
-            <a:endParaRPr lang="ko-KR" altLang="en-US"/>
           </a:p>
         </p:txBody>
       </p:sp>
@@ -3210,11 +3128,11 @@
           <a:lstStyle/>
           <a:p>
             <a:r>
-              <a:rPr lang="ko-KR" altLang="en-US" smtClean="0"/>
+              <a:rPr lang="ko-KR" altLang="en-US"/>
               <a:t>시스템의 개발 방향성을 보여주는 것</a:t>
             </a:r>
             <a:r>
-              <a:rPr lang="en-US" altLang="ko-KR" smtClean="0"/>
+              <a:rPr lang="en-US" altLang="ko-KR"/>
               <a:t>.</a:t>
             </a:r>
             <a:endParaRPr lang="ko-KR" altLang="en-US"/>
